--- a/assets/pptx/catalog-564.pptx
+++ b/assets/pptx/catalog-564.pptx
@@ -3256,7 +3256,7 @@
                 <a:ea typeface="Ebrima"/>
                 <a:cs typeface="Ebrima"/>
               </a:rPr>
-              <a:t>ያለመጠን ያለልክ አመሰግንሃልሁ አመሰግንሃልሁ (2x)</a:t>
+              <a:t>ያለመጠን ያለልክ አመሰግንሃልሁ አመሰግንሃልሁ 2x</a:t>
             </a:r>
           </a:p>
         </p:txBody>
@@ -3341,7 +3341,7 @@
                 <a:ea typeface="Ebrima"/>
                 <a:cs typeface="Ebrima"/>
               </a:rPr>
-              <a:t>አንተን ለማምልክ ግን ገደቤን ጥሻለሁ (2x)</a:t>
+              <a:t>አንተን ለማምልክ ግን ገደቤን ጥሻለሁ 2x</a:t>
             </a:r>
           </a:p>
         </p:txBody>
@@ -3583,7 +3583,7 @@
                 <a:ea typeface="Ebrima"/>
                 <a:cs typeface="Ebrima"/>
               </a:rPr>
-              <a:t>አምልኮዬ በዙፋኑ ይፍሰስ (2x)</a:t>
+              <a:t>አምልኮዬ በዙፋኑ ይፍሰስ 2x</a:t>
             </a:r>
           </a:p>
         </p:txBody>
@@ -3650,7 +3650,7 @@
                 <a:ea typeface="Ebrima"/>
                 <a:cs typeface="Ebrima"/>
               </a:rPr>
-              <a:t>እንደሚያበራ እንደሚደምቅ እንደ ከዋክብት ነህ (2x)</a:t>
+              <a:t>እንደሚያበራ እንደሚደምቅ እንደ ከዋክብት ነህ 2x</a:t>
             </a:r>
           </a:p>
           <a:p>
@@ -3668,7 +3668,7 @@
                 <a:ea typeface="Ebrima"/>
                 <a:cs typeface="Ebrima"/>
               </a:rPr>
-              <a:t>እንደምን ብዬ እንዴትስ ብዬ እንደምን ላድንቅህ (2x)</a:t>
+              <a:t>እንደምን ብዬ እንዴትስ ብዬ እንደምን ላድንቅህ 2x</a:t>
             </a:r>
           </a:p>
           <a:p>
@@ -3686,7 +3686,7 @@
                 <a:ea typeface="Ebrima"/>
                 <a:cs typeface="Ebrima"/>
               </a:rPr>
-              <a:t>በሚገባኝ ቋንቋ ባሞጋግስህ ከሚገባኝ በላይ አንተ ልዩ ነህ (2x)</a:t>
+              <a:t>በሚገባኝ ቋንቋ ባሞጋግስህ ከሚገባኝ በላይ አንተ ልዩ ነህ 2x</a:t>
             </a:r>
           </a:p>
         </p:txBody>
@@ -3928,7 +3928,7 @@
                 <a:ea typeface="Ebrima"/>
                 <a:cs typeface="Ebrima"/>
               </a:rPr>
-              <a:t>አምልኮዬ በዙፋኑ ይፍሰስ (2x)</a:t>
+              <a:t>አምልኮዬ በዙፋኑ ይፍሰስ 2x</a:t>
             </a:r>
           </a:p>
         </p:txBody>
@@ -4013,7 +4013,7 @@
                 <a:ea typeface="Ebrima"/>
                 <a:cs typeface="Ebrima"/>
               </a:rPr>
-              <a:t>አምልኮዬ በዙፋኑ ይፍሰስ (2x)</a:t>
+              <a:t>አምልኮዬ በዙፋኑ ይፍሰስ 2x</a:t>
             </a:r>
           </a:p>
         </p:txBody>
@@ -4116,7 +4116,7 @@
                 <a:ea typeface="Ebrima"/>
                 <a:cs typeface="Ebrima"/>
               </a:rPr>
-              <a:t>ሥራዬም አንተን ማምለክ ነው (2x)</a:t>
+              <a:t>ሥራዬም አንተን ማምለክ ነው 2x</a:t>
             </a:r>
           </a:p>
         </p:txBody>
@@ -4201,7 +4201,7 @@
                 <a:ea typeface="Ebrima"/>
                 <a:cs typeface="Ebrima"/>
               </a:rPr>
-              <a:t>የእኔ ግን እርሱን ማምለክ ነው (2x)</a:t>
+              <a:t>የእኔ ግን እርሱን ማምለክ ነው 2x</a:t>
             </a:r>
           </a:p>
         </p:txBody>
@@ -4407,7 +4407,7 @@
                 <a:ea typeface="Ebrima"/>
                 <a:cs typeface="Ebrima"/>
               </a:rPr>
-              <a:t>ሥራዬም አንተን ማምለክ ነው (2x)</a:t>
+              <a:t>ሥራዬም አንተን ማምለክ ነው 2x</a:t>
             </a:r>
           </a:p>
           <a:p>
@@ -4443,7 +4443,7 @@
                 <a:ea typeface="Ebrima"/>
                 <a:cs typeface="Ebrima"/>
               </a:rPr>
-              <a:t>ሥራዬም አንተን ማክብር ነው (2x)</a:t>
+              <a:t>ሥራዬም አንተን ማክብር ነው 2x</a:t>
             </a:r>
           </a:p>
           <a:p>
@@ -4479,7 +4479,7 @@
                 <a:ea typeface="Ebrima"/>
                 <a:cs typeface="Ebrima"/>
               </a:rPr>
-              <a:t>ሥራዬም ለአንተ ማዜም ነው (2x)</a:t>
+              <a:t>ሥራዬም ለአንተ ማዜም ነው 2x</a:t>
             </a:r>
           </a:p>
         </p:txBody>
@@ -4721,7 +4721,7 @@
                 <a:ea typeface="Ebrima"/>
                 <a:cs typeface="Ebrima"/>
               </a:rPr>
-              <a:t>አምልኮዬ በዙፋኑ ይፍሰስ (2x)</a:t>
+              <a:t>አምልኮዬ በዙፋኑ ይፍሰስ 2x</a:t>
             </a:r>
           </a:p>
         </p:txBody>
